--- a/data/outputs/v2/Grade11/Biology/Quizzes/SS2.2_Growth_and_Development_in_Plants/Biology_G11_SS2.2_Growth_and_Development_in_Plants_L10_QuickCheck.pptx
+++ b/data/outputs/v2/Grade11/Biology/Quizzes/SS2.2_Growth_and_Development_in_Plants/Biology_G11_SS2.2_Growth_and_Development_in_Plants_L10_QuickCheck.pptx
@@ -14,9 +14,10 @@
     <p:sldId id="262" r:id="rId8"/>
     <p:sldId id="263" r:id="rId9"/>
     <p:sldId id="264" r:id="rId10"/>
+    <p:sldId id="265" r:id="rId11"/>
   </p:sldIdLst>
   <p:notesMasterIdLst>
-    <p:notesMasterId r:id="rId11"/>
+    <p:notesMasterId r:id="rId12"/>
   </p:notesMasterIdLst>
   <p:sldSz cx="12192000" cy="6858000"/>
   <p:notesSz cx="6858000" cy="12192000"/>
@@ -534,6 +535,94 @@
             <a:fld id="{F7021451-1387-4CA6-816F-3879F97B5CBC}" type="slidenum">
               <a:rPr lang="en-US"/>
               <a:t>1</a:t>
+            </a:fld>
+            <a:endParaRPr lang="en-US"/>
+          </a:p>
+        </p:txBody>
+      </p:sp>
+    </p:spTree>
+    <p:extLst>
+      <p:ext uri="{BB962C8B-B14F-4D97-AF65-F5344CB8AC3E}">
+        <p14:creationId xmlns:p14="http://schemas.microsoft.com/office/powerpoint/2010/main" val="1024086991"/>
+      </p:ext>
+    </p:extLst>
+  </p:cSld>
+  <p:clrMapOvr>
+    <a:masterClrMapping/>
+  </p:clrMapOvr>
+</p:notes>
+</file>
+
+<file path=ppt/notesSlides/notesSlide10.xml><?xml version="1.0" encoding="utf-8"?>
+<p:notes xmlns:a="http://schemas.openxmlformats.org/drawingml/2006/main" xmlns:r="http://schemas.openxmlformats.org/officeDocument/2006/relationships" xmlns:p="http://schemas.openxmlformats.org/presentationml/2006/main">
+  <p:cSld>
+    <p:spTree>
+      <p:nvGrpSpPr>
+        <p:cNvPr id="1" name=""/>
+        <p:cNvGrpSpPr/>
+        <p:nvPr/>
+      </p:nvGrpSpPr>
+      <p:grpSpPr>
+        <a:xfrm>
+          <a:off x="0" y="0"/>
+          <a:ext cx="0" cy="0"/>
+          <a:chOff x="0" y="0"/>
+          <a:chExt cx="0" cy="0"/>
+        </a:xfrm>
+      </p:grpSpPr>
+      <p:sp>
+        <p:nvSpPr>
+          <p:cNvPr id="2" name="Slide Image Placeholder 1"/>
+          <p:cNvSpPr>
+            <a:spLocks noGrp="1" noRot="1" noChangeAspect="1"/>
+          </p:cNvSpPr>
+          <p:nvPr>
+            <p:ph type="sldImg"/>
+          </p:nvPr>
+        </p:nvSpPr>
+        <p:spPr/>
+      </p:sp>
+      <p:sp>
+        <p:nvSpPr>
+          <p:cNvPr id="3" name="Notes Placeholder 2"/>
+          <p:cNvSpPr>
+            <a:spLocks noGrp="1"/>
+          </p:cNvSpPr>
+          <p:nvPr>
+            <p:ph type="body" idx="1"/>
+          </p:nvPr>
+        </p:nvSpPr>
+        <p:spPr/>
+        <p:txBody>
+          <a:bodyPr/>
+          <a:lstStyle/>
+          <a:p>
+            <a:r>
+              <a:rPr lang="en-US" dirty="0"/>
+              <a:t/>
+            </a:r>
+            <a:endParaRPr lang="en-US" dirty="0"/>
+          </a:p>
+        </p:txBody>
+      </p:sp>
+      <p:sp>
+        <p:nvSpPr>
+          <p:cNvPr id="4" name="Slide Number Placeholder 3"/>
+          <p:cNvSpPr>
+            <a:spLocks noGrp="1"/>
+          </p:cNvSpPr>
+          <p:nvPr>
+            <p:ph type="sldNum" sz="quarter" idx="10"/>
+          </p:nvPr>
+        </p:nvSpPr>
+        <p:spPr/>
+        <p:txBody>
+          <a:bodyPr/>
+          <a:lstStyle/>
+          <a:p>
+            <a:fld id="{F7021451-1387-4CA6-816F-3879F97B5CBC}" type="slidenum">
+              <a:rPr lang="en-US"/>
+              <a:t>10</a:t>
             </a:fld>
             <a:endParaRPr lang="en-US"/>
           </a:p>
@@ -1690,7 +1779,7 @@
               <a:buNone/>
             </a:pPr>
             <a:r>
-              <a:rPr lang="en-US" sz="1600" dirty="0">
+              <a:rPr lang="en-US" sz="2000" dirty="0">
                 <a:solidFill>
                   <a:srgbClr val="D9EEF1"/>
                 </a:solidFill>
@@ -1698,9 +1787,9 @@
                 <a:ea typeface="Arial" pitchFamily="34" charset="-122"/>
                 <a:cs typeface="Arial" pitchFamily="34" charset="-120"/>
               </a:rPr>
-              <a:t>Lesson 10: Synthesis and Application: Explaining the Farmer's Maize and Beans and Planning the Tree Nursery</a:t>
-            </a:r>
-            <a:endParaRPr lang="en-US" sz="1600" dirty="0"/>
+              <a:t>Lesson 10: Presenting Our Final Explanation and Sharing Seedlings with Kitale</a:t>
+            </a:r>
+            <a:endParaRPr lang="en-US" sz="2000" dirty="0"/>
           </a:p>
         </p:txBody>
       </p:sp>
@@ -1737,7 +1826,7 @@
                 <a:ea typeface="Arial" pitchFamily="34" charset="-122"/>
                 <a:cs typeface="Arial" pitchFamily="34" charset="-120"/>
               </a:rPr>
-              <a:t>7 multiple-choice questions  •  choose A, B, C or D</a:t>
+              <a:t>8 multiple-choice questions  •  choose A, B, C or D</a:t>
             </a:r>
             <a:endParaRPr lang="en-US" sz="1600" dirty="0"/>
           </a:p>
@@ -1853,6 +1942,116 @@
               <a:t> (https://creativecommons.org/licenses/by-nc/4.0/).</a:t>
             </a:r>
             <a:endParaRPr lang="en-US" sz="900" dirty="0"/>
+          </a:p>
+        </p:txBody>
+      </p:sp>
+    </p:spTree>
+  </p:cSld>
+  <p:clrMapOvr>
+    <a:masterClrMapping/>
+  </p:clrMapOvr>
+</p:sld>
+</file>
+
+<file path=ppt/slides/slide10.xml><?xml version="1.0" encoding="utf-8"?>
+<p:sld xmlns:a="http://schemas.openxmlformats.org/drawingml/2006/main" xmlns:r="http://schemas.openxmlformats.org/officeDocument/2006/relationships" xmlns:p="http://schemas.openxmlformats.org/presentationml/2006/main">
+  <p:cSld name="Slide 10">
+    <p:bg>
+      <p:bgPr>
+        <a:solidFill>
+          <a:srgbClr val="1F3864"/>
+        </a:solidFill>
+      </p:bgPr>
+    </p:bg>
+    <p:spTree>
+      <p:nvGrpSpPr>
+        <p:cNvPr id="1" name=""/>
+        <p:cNvGrpSpPr/>
+        <p:nvPr/>
+      </p:nvGrpSpPr>
+      <p:grpSpPr>
+        <a:xfrm>
+          <a:off x="0" y="0"/>
+          <a:ext cx="0" cy="0"/>
+          <a:chOff x="0" y="0"/>
+          <a:chExt cx="0" cy="0"/>
+        </a:xfrm>
+      </p:grpSpPr>
+      <p:sp>
+        <p:nvSpPr>
+          <p:cNvPr id="2" name="Text 0"/>
+          <p:cNvSpPr/>
+          <p:nvPr/>
+        </p:nvSpPr>
+        <p:spPr>
+          <a:xfrm>
+            <a:off x="731520" y="2194560"/>
+            <a:ext cx="10698480" cy="822960"/>
+          </a:xfrm>
+          <a:prstGeom prst="rect">
+            <a:avLst/>
+          </a:prstGeom>
+          <a:noFill/>
+          <a:ln/>
+        </p:spPr>
+        <p:txBody>
+          <a:bodyPr wrap="square" lIns="0" tIns="0" rIns="0" bIns="0" rtlCol="0" anchor="ctr"/>
+          <a:lstStyle/>
+          <a:p>
+            <a:pPr indent="0" marL="0">
+              <a:buNone/>
+            </a:pPr>
+            <a:r>
+              <a:rPr lang="en-US" sz="3400" b="1" dirty="0">
+                <a:solidFill>
+                  <a:srgbClr val="FFFFFF"/>
+                </a:solidFill>
+                <a:latin typeface="Arial" pitchFamily="34" charset="0"/>
+                <a:ea typeface="Arial" pitchFamily="34" charset="-122"/>
+                <a:cs typeface="Arial" pitchFamily="34" charset="-120"/>
+              </a:rPr>
+              <a:t>All done</a:t>
+            </a:r>
+            <a:endParaRPr lang="en-US" sz="3400" dirty="0"/>
+          </a:p>
+        </p:txBody>
+      </p:sp>
+      <p:sp>
+        <p:nvSpPr>
+          <p:cNvPr id="3" name="Text 1"/>
+          <p:cNvSpPr/>
+          <p:nvPr/>
+        </p:nvSpPr>
+        <p:spPr>
+          <a:xfrm>
+            <a:off x="731520" y="3108960"/>
+            <a:ext cx="10698480" cy="731520"/>
+          </a:xfrm>
+          <a:prstGeom prst="rect">
+            <a:avLst/>
+          </a:prstGeom>
+          <a:noFill/>
+          <a:ln/>
+        </p:spPr>
+        <p:txBody>
+          <a:bodyPr wrap="square" lIns="0" tIns="0" rIns="0" bIns="0" rtlCol="0" anchor="ctr"/>
+          <a:lstStyle/>
+          <a:p>
+            <a:pPr indent="0" marL="0">
+              <a:buNone/>
+            </a:pPr>
+            <a:r>
+              <a:rPr lang="en-US" sz="1800" dirty="0">
+                <a:solidFill>
+                  <a:srgbClr val="D9EEF1"/>
+                </a:solidFill>
+                <a:latin typeface="Arial" pitchFamily="34" charset="0"/>
+                <a:ea typeface="Arial" pitchFamily="34" charset="-122"/>
+                <a:cs typeface="Arial" pitchFamily="34" charset="-120"/>
+              </a:rPr>
+              <a:t>Ask your teacher how to submit your answers today (for example, on a paper answer slip).</a:t>
+            </a:r>
+            <a:endParaRPr lang="en-US" sz="1800" dirty="0"/>
           </a:p>
         </p:txBody>
       </p:sp>
@@ -1921,7 +2120,7 @@
                 <a:ea typeface="Arial" pitchFamily="34" charset="-122"/>
                 <a:cs typeface="Arial" pitchFamily="34" charset="-120"/>
               </a:rPr>
-              <a:t>QUESTION 1 OF 7</a:t>
+              <a:t>QUESTION 1 OF 8</a:t>
             </a:r>
             <a:endParaRPr lang="en-US" sz="1300" dirty="0"/>
           </a:p>
@@ -2013,17 +2212,17 @@
               <a:buNone/>
             </a:pPr>
             <a:r>
-              <a:rPr lang="en-US" sz="2000" b="1" dirty="0">
-                <a:solidFill>
-                  <a:srgbClr val="FFFFFF"/>
-                </a:solidFill>
-                <a:latin typeface="Arial" pitchFamily="34" charset="0"/>
-                <a:ea typeface="Arial" pitchFamily="34" charset="-122"/>
-                <a:cs typeface="Arial" pitchFamily="34" charset="-120"/>
-              </a:rPr>
-              <a:t>A school in Machakos wants to grow 200 mango and grevillea seedlings from stem cuttings. Which idea would best help the cuttings form roots?</a:t>
-            </a:r>
-            <a:endParaRPr lang="en-US" sz="2000" dirty="0"/>
+              <a:rPr lang="en-US" sz="1800" b="1" dirty="0">
+                <a:solidFill>
+                  <a:srgbClr val="FFFFFF"/>
+                </a:solidFill>
+                <a:latin typeface="Arial" pitchFamily="34" charset="0"/>
+                <a:ea typeface="Arial" pitchFamily="34" charset="-122"/>
+                <a:cs typeface="Arial" pitchFamily="34" charset="-120"/>
+              </a:rPr>
+              <a:t>Mr. Wafula planted maize and beans on the same day, in the same field, after the same 25 mm of rain. Fewer bean seeds than maize seeds germinated, and they grew differently. Which explanation is best supported by the evidence?</a:t>
+            </a:r>
+            <a:endParaRPr lang="en-US" sz="1800" dirty="0"/>
           </a:p>
         </p:txBody>
       </p:sp>
@@ -2121,7 +2320,7 @@
                 <a:ea typeface="Arial" pitchFamily="34" charset="-122"/>
                 <a:cs typeface="Arial" pitchFamily="34" charset="-120"/>
               </a:rPr>
-              <a:t>Remove all the leaves and the cut surface so nothing is left to use water</a:t>
+              <a:t>Healthy-looking seeds always germinate, so the differences are just chance.</a:t>
             </a:r>
             <a:endParaRPr lang="en-US" sz="1300" dirty="0"/>
           </a:p>
@@ -2221,7 +2420,7 @@
                 <a:ea typeface="Arial" pitchFamily="34" charset="-122"/>
                 <a:cs typeface="Arial" pitchFamily="34" charset="-120"/>
               </a:rPr>
-              <a:t>Keep the cuttings in full sun without water so they become strong</a:t>
+              <a:t>The beans were planted on a different day from the maize.</a:t>
             </a:r>
             <a:endParaRPr lang="en-US" sz="1300" dirty="0"/>
           </a:p>
@@ -2321,7 +2520,7 @@
                 <a:ea typeface="Arial" pitchFamily="34" charset="-122"/>
                 <a:cs typeface="Arial" pitchFamily="34" charset="-120"/>
               </a:rPr>
-              <a:t>Spread fertiliser on the cut end, because fertiliser makes roots form</a:t>
+              <a:t>The differences come from seed structure, seed condition (such as dormancy and viability) and the environment (such as waterlogging and oxygen).</a:t>
             </a:r>
             <a:endParaRPr lang="en-US" sz="1300" dirty="0"/>
           </a:p>
@@ -2421,7 +2620,7 @@
                 <a:ea typeface="Arial" pitchFamily="34" charset="-122"/>
                 <a:cs typeface="Arial" pitchFamily="34" charset="-120"/>
               </a:rPr>
-              <a:t>Apply a plant hormone source such as crushed bulb onion or Aloe gel to the cut end, because auxins stimulate roots to form</a:t>
+              <a:t>The rain fell more on the beans than on the maize.</a:t>
             </a:r>
             <a:endParaRPr lang="en-US" sz="1300" dirty="0"/>
           </a:p>
@@ -2531,7 +2730,7 @@
                 <a:ea typeface="Arial" pitchFamily="34" charset="-122"/>
                 <a:cs typeface="Arial" pitchFamily="34" charset="-120"/>
               </a:rPr>
-              <a:t>QUESTION 2 OF 7</a:t>
+              <a:t>QUESTION 2 OF 8</a:t>
             </a:r>
             <a:endParaRPr lang="en-US" sz="1300" dirty="0"/>
           </a:p>
@@ -2623,17 +2822,17 @@
               <a:buNone/>
             </a:pPr>
             <a:r>
-              <a:rPr lang="en-US" sz="2000" b="1" dirty="0">
-                <a:solidFill>
-                  <a:srgbClr val="FFFFFF"/>
-                </a:solidFill>
-                <a:latin typeface="Arial" pitchFamily="34" charset="0"/>
-                <a:ea typeface="Arial" pitchFamily="34" charset="-122"/>
-                <a:cs typeface="Arial" pitchFamily="34" charset="-120"/>
-              </a:rPr>
-              <a:t>In a rooting test, four hibiscus cuttings were treated with crushed bulb onion, Aloe gel, cinnamon powder, or water only. Why is the cutting treated with water only included?</a:t>
-            </a:r>
-            <a:endParaRPr lang="en-US" sz="2000" dirty="0"/>
+              <a:rPr lang="en-US" sz="1600" b="1" dirty="0">
+                <a:solidFill>
+                  <a:srgbClr val="FFFFFF"/>
+                </a:solidFill>
+                <a:latin typeface="Arial" pitchFamily="34" charset="0"/>
+                <a:ea typeface="Arial" pitchFamily="34" charset="-122"/>
+                <a:cs typeface="Arial" pitchFamily="34" charset="-120"/>
+              </a:rPr>
+              <a:t>Out of 100 Rosecoco bean seeds planted by Mr. Wafula, 80 germinated. The seeds that failed were: 8 with hard seed coats (dormant), 6 in the waterlogged patch, 4 non-viable and 2 damaged by pests. How many seeds failed to germinate in total, and does this agree with the 80 that germinated?</a:t>
+            </a:r>
+            <a:endParaRPr lang="en-US" sz="1600" dirty="0"/>
           </a:p>
         </p:txBody>
       </p:sp>
@@ -2723,17 +2922,17 @@
               <a:buNone/>
             </a:pPr>
             <a:r>
-              <a:rPr lang="en-US" sz="1500" dirty="0">
-                <a:solidFill>
-                  <a:srgbClr val="FFFFFF"/>
-                </a:solidFill>
-                <a:latin typeface="Arial" pitchFamily="34" charset="0"/>
-                <a:ea typeface="Arial" pitchFamily="34" charset="-122"/>
-                <a:cs typeface="Arial" pitchFamily="34" charset="-120"/>
-              </a:rPr>
-              <a:t>It shows which cutting will die first</a:t>
-            </a:r>
-            <a:endParaRPr lang="en-US" sz="1500" dirty="0"/>
+              <a:rPr lang="en-US" sz="1700" dirty="0">
+                <a:solidFill>
+                  <a:srgbClr val="FFFFFF"/>
+                </a:solidFill>
+                <a:latin typeface="Arial" pitchFamily="34" charset="0"/>
+                <a:ea typeface="Arial" pitchFamily="34" charset="-122"/>
+                <a:cs typeface="Arial" pitchFamily="34" charset="-120"/>
+              </a:rPr>
+              <a:t>20 failed, which agrees with 80 germinating</a:t>
+            </a:r>
+            <a:endParaRPr lang="en-US" sz="1700" dirty="0"/>
           </a:p>
         </p:txBody>
       </p:sp>
@@ -2823,17 +3022,17 @@
               <a:buNone/>
             </a:pPr>
             <a:r>
-              <a:rPr lang="en-US" sz="1500" dirty="0">
-                <a:solidFill>
-                  <a:srgbClr val="FFFFFF"/>
-                </a:solidFill>
-                <a:latin typeface="Arial" pitchFamily="34" charset="0"/>
-                <a:ea typeface="Arial" pitchFamily="34" charset="-122"/>
-                <a:cs typeface="Arial" pitchFamily="34" charset="-120"/>
-              </a:rPr>
-              <a:t>It is the best treatment because water is the only thing roots need</a:t>
-            </a:r>
-            <a:endParaRPr lang="en-US" sz="1500" dirty="0"/>
+              <a:rPr lang="en-US" sz="1700" dirty="0">
+                <a:solidFill>
+                  <a:srgbClr val="FFFFFF"/>
+                </a:solidFill>
+                <a:latin typeface="Arial" pitchFamily="34" charset="0"/>
+                <a:ea typeface="Arial" pitchFamily="34" charset="-122"/>
+                <a:cs typeface="Arial" pitchFamily="34" charset="-120"/>
+              </a:rPr>
+              <a:t>22 failed, so 78 should have germinated</a:t>
+            </a:r>
+            <a:endParaRPr lang="en-US" sz="1700" dirty="0"/>
           </a:p>
         </p:txBody>
       </p:sp>
@@ -2923,17 +3122,17 @@
               <a:buNone/>
             </a:pPr>
             <a:r>
-              <a:rPr lang="en-US" sz="1500" dirty="0">
-                <a:solidFill>
-                  <a:srgbClr val="FFFFFF"/>
-                </a:solidFill>
-                <a:latin typeface="Arial" pitchFamily="34" charset="0"/>
-                <a:ea typeface="Arial" pitchFamily="34" charset="-122"/>
-                <a:cs typeface="Arial" pitchFamily="34" charset="-120"/>
-              </a:rPr>
-              <a:t>It makes sure all the cuttings get the same amount of onion</a:t>
-            </a:r>
-            <a:endParaRPr lang="en-US" sz="1500" dirty="0"/>
+              <a:rPr lang="en-US" sz="1700" dirty="0">
+                <a:solidFill>
+                  <a:srgbClr val="FFFFFF"/>
+                </a:solidFill>
+                <a:latin typeface="Arial" pitchFamily="34" charset="0"/>
+                <a:ea typeface="Arial" pitchFamily="34" charset="-122"/>
+                <a:cs typeface="Arial" pitchFamily="34" charset="-120"/>
+              </a:rPr>
+              <a:t>12 failed, which agrees with 88 germinating</a:t>
+            </a:r>
+            <a:endParaRPr lang="en-US" sz="1700" dirty="0"/>
           </a:p>
         </p:txBody>
       </p:sp>
@@ -3023,17 +3222,17 @@
               <a:buNone/>
             </a:pPr>
             <a:r>
-              <a:rPr lang="en-US" sz="1500" dirty="0">
-                <a:solidFill>
-                  <a:srgbClr val="FFFFFF"/>
-                </a:solidFill>
-                <a:latin typeface="Arial" pitchFamily="34" charset="0"/>
-                <a:ea typeface="Arial" pitchFamily="34" charset="-122"/>
-                <a:cs typeface="Arial" pitchFamily="34" charset="-120"/>
-              </a:rPr>
-              <a:t>It is the control, used to compare how many roots form with no rooting substance added</a:t>
-            </a:r>
-            <a:endParaRPr lang="en-US" sz="1500" dirty="0"/>
+              <a:rPr lang="en-US" sz="1700" dirty="0">
+                <a:solidFill>
+                  <a:srgbClr val="FFFFFF"/>
+                </a:solidFill>
+                <a:latin typeface="Arial" pitchFamily="34" charset="0"/>
+                <a:ea typeface="Arial" pitchFamily="34" charset="-122"/>
+                <a:cs typeface="Arial" pitchFamily="34" charset="-120"/>
+              </a:rPr>
+              <a:t>18 failed, so 82 should have germinated</a:t>
+            </a:r>
+            <a:endParaRPr lang="en-US" sz="1700" dirty="0"/>
           </a:p>
         </p:txBody>
       </p:sp>
@@ -3141,7 +3340,7 @@
                 <a:ea typeface="Arial" pitchFamily="34" charset="-122"/>
                 <a:cs typeface="Arial" pitchFamily="34" charset="-120"/>
               </a:rPr>
-              <a:t>QUESTION 3 OF 7</a:t>
+              <a:t>QUESTION 3 OF 8</a:t>
             </a:r>
             <a:endParaRPr lang="en-US" sz="1300" dirty="0"/>
           </a:p>
@@ -3233,17 +3432,17 @@
               <a:buNone/>
             </a:pPr>
             <a:r>
-              <a:rPr lang="en-US" sz="2000" b="1" dirty="0">
-                <a:solidFill>
-                  <a:srgbClr val="FFFFFF"/>
-                </a:solidFill>
-                <a:latin typeface="Arial" pitchFamily="34" charset="0"/>
-                <a:ea typeface="Arial" pitchFamily="34" charset="-122"/>
-                <a:cs typeface="Arial" pitchFamily="34" charset="-120"/>
-              </a:rPr>
-              <a:t>A farmer plants healthy-looking bean seeds in warm, moist soil with enough air. Most germinate, but a few do not even after many days. What is the most likely reason for the few that fail?</a:t>
-            </a:r>
-            <a:endParaRPr lang="en-US" sz="2000" dirty="0"/>
+              <a:rPr lang="en-US" sz="1600" b="1" dirty="0">
+                <a:solidFill>
+                  <a:srgbClr val="FFFFFF"/>
+                </a:solidFill>
+                <a:latin typeface="Arial" pitchFamily="34" charset="0"/>
+                <a:ea typeface="Arial" pitchFamily="34" charset="-122"/>
+                <a:cs typeface="Arial" pitchFamily="34" charset="-120"/>
+              </a:rPr>
+              <a:t>A learner puts 20 bean seeds in each of two jars kept at 25 °C. Jar 1 has moist cotton wool and air, and 18 seeds germinate. Jar 2 has the same temperature and water but the seeds are fully covered in water with no air, and only 1 seed germinates. What does this show?</a:t>
+            </a:r>
+            <a:endParaRPr lang="en-US" sz="1600" dirty="0"/>
           </a:p>
         </p:txBody>
       </p:sp>
@@ -3341,7 +3540,7 @@
                 <a:ea typeface="Arial" pitchFamily="34" charset="-122"/>
                 <a:cs typeface="Arial" pitchFamily="34" charset="-120"/>
               </a:rPr>
-              <a:t>The seeds are dormant, for example with a hard seed coat, so germination has not been triggered</a:t>
+              <a:t>Seeds need soil to germinate.</a:t>
             </a:r>
             <a:endParaRPr lang="en-US" sz="1500" dirty="0"/>
           </a:p>
@@ -3441,7 +3640,7 @@
                 <a:ea typeface="Arial" pitchFamily="34" charset="-122"/>
                 <a:cs typeface="Arial" pitchFamily="34" charset="-120"/>
               </a:rPr>
-              <a:t>There is no water in the soil</a:t>
+              <a:t>Seeds need oxygen for respiration to germinate, which is why waterlogged seeds fail.</a:t>
             </a:r>
             <a:endParaRPr lang="en-US" sz="1500" dirty="0"/>
           </a:p>
@@ -3541,7 +3740,7 @@
                 <a:ea typeface="Arial" pitchFamily="34" charset="-122"/>
                 <a:cs typeface="Arial" pitchFamily="34" charset="-120"/>
               </a:rPr>
-              <a:t>Beans do not have any hormones</a:t>
+              <a:t>Seeds germinate best when they have too much water.</a:t>
             </a:r>
             <a:endParaRPr lang="en-US" sz="1500" dirty="0"/>
           </a:p>
@@ -3641,7 +3840,7 @@
                 <a:ea typeface="Arial" pitchFamily="34" charset="-122"/>
                 <a:cs typeface="Arial" pitchFamily="34" charset="-120"/>
               </a:rPr>
-              <a:t>The seeds are monocots, so they cannot germinate</a:t>
+              <a:t>Seeds need light to germinate.</a:t>
             </a:r>
             <a:endParaRPr lang="en-US" sz="1500" dirty="0"/>
           </a:p>
@@ -3751,7 +3950,7 @@
                 <a:ea typeface="Arial" pitchFamily="34" charset="-122"/>
                 <a:cs typeface="Arial" pitchFamily="34" charset="-120"/>
               </a:rPr>
-              <a:t>QUESTION 4 OF 7</a:t>
+              <a:t>QUESTION 4 OF 8</a:t>
             </a:r>
             <a:endParaRPr lang="en-US" sz="1300" dirty="0"/>
           </a:p>
@@ -3843,17 +4042,17 @@
               <a:buNone/>
             </a:pPr>
             <a:r>
-              <a:rPr lang="en-US" sz="2300" b="1" dirty="0">
-                <a:solidFill>
-                  <a:srgbClr val="FFFFFF"/>
-                </a:solidFill>
-                <a:latin typeface="Arial" pitchFamily="34" charset="0"/>
-                <a:ea typeface="Arial" pitchFamily="34" charset="-122"/>
-                <a:cs typeface="Arial" pitchFamily="34" charset="-120"/>
-              </a:rPr>
-              <a:t>Which statement correctly describes germination in maize and in common bean?</a:t>
-            </a:r>
-            <a:endParaRPr lang="en-US" sz="2300" dirty="0"/>
+              <a:rPr lang="en-US" sz="2000" b="1" dirty="0">
+                <a:solidFill>
+                  <a:srgbClr val="FFFFFF"/>
+                </a:solidFill>
+                <a:latin typeface="Arial" pitchFamily="34" charset="0"/>
+                <a:ea typeface="Arial" pitchFamily="34" charset="-122"/>
+                <a:cs typeface="Arial" pitchFamily="34" charset="-120"/>
+              </a:rPr>
+              <a:t>Eight bean seeds looked healthy but did not germinate in moist, warm soil. After the hard seed coat was scratched (scarification), 7 of the 8 germinated. What is the best explanation?</a:t>
+            </a:r>
+            <a:endParaRPr lang="en-US" sz="2000" dirty="0"/>
           </a:p>
         </p:txBody>
       </p:sp>
@@ -3943,17 +4142,17 @@
               <a:buNone/>
             </a:pPr>
             <a:r>
-              <a:rPr lang="en-US" sz="1300" dirty="0">
-                <a:solidFill>
-                  <a:srgbClr val="FFFFFF"/>
-                </a:solidFill>
-                <a:latin typeface="Arial" pitchFamily="34" charset="0"/>
-                <a:ea typeface="Arial" pitchFamily="34" charset="-122"/>
-                <a:cs typeface="Arial" pitchFamily="34" charset="-120"/>
-              </a:rPr>
-              <a:t>Both are epigeal, because all seeds push their cotyledons above the ground</a:t>
-            </a:r>
-            <a:endParaRPr lang="en-US" sz="1300" dirty="0"/>
+              <a:rPr lang="en-US" sz="1700" dirty="0">
+                <a:solidFill>
+                  <a:srgbClr val="FFFFFF"/>
+                </a:solidFill>
+                <a:latin typeface="Arial" pitchFamily="34" charset="0"/>
+                <a:ea typeface="Arial" pitchFamily="34" charset="-122"/>
+                <a:cs typeface="Arial" pitchFamily="34" charset="-120"/>
+              </a:rPr>
+              <a:t>The seeds were non-viable (dead) from the start.</a:t>
+            </a:r>
+            <a:endParaRPr lang="en-US" sz="1700" dirty="0"/>
           </a:p>
         </p:txBody>
       </p:sp>
@@ -4043,17 +4242,17 @@
               <a:buNone/>
             </a:pPr>
             <a:r>
-              <a:rPr lang="en-US" sz="1300" dirty="0">
-                <a:solidFill>
-                  <a:srgbClr val="FFFFFF"/>
-                </a:solidFill>
-                <a:latin typeface="Arial" pitchFamily="34" charset="0"/>
-                <a:ea typeface="Arial" pitchFamily="34" charset="-122"/>
-                <a:cs typeface="Arial" pitchFamily="34" charset="-120"/>
-              </a:rPr>
-              <a:t>Maize is hypogeal, with its cotyledon staying underground, while bean is epigeal, with its cotyledons raised above the ground</a:t>
-            </a:r>
-            <a:endParaRPr lang="en-US" sz="1300" dirty="0"/>
+              <a:rPr lang="en-US" sz="1700" dirty="0">
+                <a:solidFill>
+                  <a:srgbClr val="FFFFFF"/>
+                </a:solidFill>
+                <a:latin typeface="Arial" pitchFamily="34" charset="0"/>
+                <a:ea typeface="Arial" pitchFamily="34" charset="-122"/>
+                <a:cs typeface="Arial" pitchFamily="34" charset="-120"/>
+              </a:rPr>
+              <a:t>The seeds had too much oxygen before they were scratched.</a:t>
+            </a:r>
+            <a:endParaRPr lang="en-US" sz="1700" dirty="0"/>
           </a:p>
         </p:txBody>
       </p:sp>
@@ -4143,17 +4342,17 @@
               <a:buNone/>
             </a:pPr>
             <a:r>
-              <a:rPr lang="en-US" sz="1300" dirty="0">
-                <a:solidFill>
-                  <a:srgbClr val="FFFFFF"/>
-                </a:solidFill>
-                <a:latin typeface="Arial" pitchFamily="34" charset="0"/>
-                <a:ea typeface="Arial" pitchFamily="34" charset="-122"/>
-                <a:cs typeface="Arial" pitchFamily="34" charset="-120"/>
-              </a:rPr>
-              <a:t>Both are hypogeal, because seeds always germinate underground</a:t>
-            </a:r>
-            <a:endParaRPr lang="en-US" sz="1300" dirty="0"/>
+              <a:rPr lang="en-US" sz="1700" dirty="0">
+                <a:solidFill>
+                  <a:srgbClr val="FFFFFF"/>
+                </a:solidFill>
+                <a:latin typeface="Arial" pitchFamily="34" charset="0"/>
+                <a:ea typeface="Arial" pitchFamily="34" charset="-122"/>
+                <a:cs typeface="Arial" pitchFamily="34" charset="-120"/>
+              </a:rPr>
+              <a:t>The seeds were damaged by pests, which scarification repaired.</a:t>
+            </a:r>
+            <a:endParaRPr lang="en-US" sz="1700" dirty="0"/>
           </a:p>
         </p:txBody>
       </p:sp>
@@ -4243,17 +4442,17 @@
               <a:buNone/>
             </a:pPr>
             <a:r>
-              <a:rPr lang="en-US" sz="1300" dirty="0">
-                <a:solidFill>
-                  <a:srgbClr val="FFFFFF"/>
-                </a:solidFill>
-                <a:latin typeface="Arial" pitchFamily="34" charset="0"/>
-                <a:ea typeface="Arial" pitchFamily="34" charset="-122"/>
-                <a:cs typeface="Arial" pitchFamily="34" charset="-120"/>
-              </a:rPr>
-              <a:t>Maize is epigeal and bean is hypogeal, because maize has two cotyledons</a:t>
-            </a:r>
-            <a:endParaRPr lang="en-US" sz="1300" dirty="0"/>
+              <a:rPr lang="en-US" sz="1700" dirty="0">
+                <a:solidFill>
+                  <a:srgbClr val="FFFFFF"/>
+                </a:solidFill>
+                <a:latin typeface="Arial" pitchFamily="34" charset="0"/>
+                <a:ea typeface="Arial" pitchFamily="34" charset="-122"/>
+                <a:cs typeface="Arial" pitchFamily="34" charset="-120"/>
+              </a:rPr>
+              <a:t>The seeds were dormant because the hard testa stopped water from entering.</a:t>
+            </a:r>
+            <a:endParaRPr lang="en-US" sz="1700" dirty="0"/>
           </a:p>
         </p:txBody>
       </p:sp>
@@ -4361,7 +4560,7 @@
                 <a:ea typeface="Arial" pitchFamily="34" charset="-122"/>
                 <a:cs typeface="Arial" pitchFamily="34" charset="-120"/>
               </a:rPr>
-              <a:t>QUESTION 5 OF 7</a:t>
+              <a:t>QUESTION 5 OF 8</a:t>
             </a:r>
             <a:endParaRPr lang="en-US" sz="1300" dirty="0"/>
           </a:p>
@@ -4453,17 +4652,17 @@
               <a:buNone/>
             </a:pPr>
             <a:r>
-              <a:rPr lang="en-US" sz="1800" b="1" dirty="0">
-                <a:solidFill>
-                  <a:srgbClr val="FFFFFF"/>
-                </a:solidFill>
-                <a:latin typeface="Arial" pitchFamily="34" charset="0"/>
-                <a:ea typeface="Arial" pitchFamily="34" charset="-122"/>
-                <a:cs typeface="Arial" pitchFamily="34" charset="-120"/>
-              </a:rPr>
-              <a:t>In a class test, 10 soaked bean seeds and 10 dry bean seeds were kept under the same warm conditions. 8 of the soaked seeds germinated and 3 of the dry seeds germinated. What percentage of the soaked seeds germinated?</a:t>
-            </a:r>
-            <a:endParaRPr lang="en-US" sz="1800" dirty="0"/>
+              <a:rPr lang="en-US" sz="2300" b="1" dirty="0">
+                <a:solidFill>
+                  <a:srgbClr val="FFFFFF"/>
+                </a:solidFill>
+                <a:latin typeface="Arial" pitchFamily="34" charset="0"/>
+                <a:ea typeface="Arial" pitchFamily="34" charset="-122"/>
+                <a:cs typeface="Arial" pitchFamily="34" charset="-120"/>
+              </a:rPr>
+              <a:t>Which statement correctly compares how maize and bean seedlings emerge from the soil?</a:t>
+            </a:r>
+            <a:endParaRPr lang="en-US" sz="2300" dirty="0"/>
           </a:p>
         </p:txBody>
       </p:sp>
@@ -4553,17 +4752,17 @@
               <a:buNone/>
             </a:pPr>
             <a:r>
-              <a:rPr lang="en-US" sz="1700" dirty="0">
-                <a:solidFill>
-                  <a:srgbClr val="FFFFFF"/>
-                </a:solidFill>
-                <a:latin typeface="Arial" pitchFamily="34" charset="0"/>
-                <a:ea typeface="Arial" pitchFamily="34" charset="-122"/>
-                <a:cs typeface="Arial" pitchFamily="34" charset="-120"/>
-              </a:rPr>
-              <a:t>50%</a:t>
-            </a:r>
-            <a:endParaRPr lang="en-US" sz="1700" dirty="0"/>
+              <a:rPr lang="en-US" sz="1300" dirty="0">
+                <a:solidFill>
+                  <a:srgbClr val="FFFFFF"/>
+                </a:solidFill>
+                <a:latin typeface="Arial" pitchFamily="34" charset="0"/>
+                <a:ea typeface="Arial" pitchFamily="34" charset="-122"/>
+                <a:cs typeface="Arial" pitchFamily="34" charset="-120"/>
+              </a:rPr>
+              <a:t>Maize is hypogeal: its scutellum stays underground while the coleoptile pierces the soil. Beans are epigeal: their two cotyledons are raised above ground.</a:t>
+            </a:r>
+            <a:endParaRPr lang="en-US" sz="1300" dirty="0"/>
           </a:p>
         </p:txBody>
       </p:sp>
@@ -4653,17 +4852,17 @@
               <a:buNone/>
             </a:pPr>
             <a:r>
-              <a:rPr lang="en-US" sz="1700" dirty="0">
-                <a:solidFill>
-                  <a:srgbClr val="FFFFFF"/>
-                </a:solidFill>
-                <a:latin typeface="Arial" pitchFamily="34" charset="0"/>
-                <a:ea typeface="Arial" pitchFamily="34" charset="-122"/>
-                <a:cs typeface="Arial" pitchFamily="34" charset="-120"/>
-              </a:rPr>
-              <a:t>30%</a:t>
-            </a:r>
-            <a:endParaRPr lang="en-US" sz="1700" dirty="0"/>
+              <a:rPr lang="en-US" sz="1300" dirty="0">
+                <a:solidFill>
+                  <a:srgbClr val="FFFFFF"/>
+                </a:solidFill>
+                <a:latin typeface="Arial" pitchFamily="34" charset="0"/>
+                <a:ea typeface="Arial" pitchFamily="34" charset="-122"/>
+                <a:cs typeface="Arial" pitchFamily="34" charset="-120"/>
+              </a:rPr>
+              <a:t>Both maize and beans are epigeal because both have a plumule.</a:t>
+            </a:r>
+            <a:endParaRPr lang="en-US" sz="1300" dirty="0"/>
           </a:p>
         </p:txBody>
       </p:sp>
@@ -4753,17 +4952,17 @@
               <a:buNone/>
             </a:pPr>
             <a:r>
-              <a:rPr lang="en-US" sz="1700" dirty="0">
-                <a:solidFill>
-                  <a:srgbClr val="FFFFFF"/>
-                </a:solidFill>
-                <a:latin typeface="Arial" pitchFamily="34" charset="0"/>
-                <a:ea typeface="Arial" pitchFamily="34" charset="-122"/>
-                <a:cs typeface="Arial" pitchFamily="34" charset="-120"/>
-              </a:rPr>
-              <a:t>80%</a:t>
-            </a:r>
-            <a:endParaRPr lang="en-US" sz="1700" dirty="0"/>
+              <a:rPr lang="en-US" sz="1300" dirty="0">
+                <a:solidFill>
+                  <a:srgbClr val="FFFFFF"/>
+                </a:solidFill>
+                <a:latin typeface="Arial" pitchFamily="34" charset="0"/>
+                <a:ea typeface="Arial" pitchFamily="34" charset="-122"/>
+                <a:cs typeface="Arial" pitchFamily="34" charset="-120"/>
+              </a:rPr>
+              <a:t>Both maize and beans are hypogeal because both are planted 3 cm deep.</a:t>
+            </a:r>
+            <a:endParaRPr lang="en-US" sz="1300" dirty="0"/>
           </a:p>
         </p:txBody>
       </p:sp>
@@ -4853,17 +5052,17 @@
               <a:buNone/>
             </a:pPr>
             <a:r>
-              <a:rPr lang="en-US" sz="1700" dirty="0">
-                <a:solidFill>
-                  <a:srgbClr val="FFFFFF"/>
-                </a:solidFill>
-                <a:latin typeface="Arial" pitchFamily="34" charset="0"/>
-                <a:ea typeface="Arial" pitchFamily="34" charset="-122"/>
-                <a:cs typeface="Arial" pitchFamily="34" charset="-120"/>
-              </a:rPr>
-              <a:t>8%</a:t>
-            </a:r>
-            <a:endParaRPr lang="en-US" sz="1700" dirty="0"/>
+              <a:rPr lang="en-US" sz="1300" dirty="0">
+                <a:solidFill>
+                  <a:srgbClr val="FFFFFF"/>
+                </a:solidFill>
+                <a:latin typeface="Arial" pitchFamily="34" charset="0"/>
+                <a:ea typeface="Arial" pitchFamily="34" charset="-122"/>
+                <a:cs typeface="Arial" pitchFamily="34" charset="-120"/>
+              </a:rPr>
+              <a:t>Maize is epigeal: its cotyledons are lifted above the ground. Beans are hypogeal.</a:t>
+            </a:r>
+            <a:endParaRPr lang="en-US" sz="1300" dirty="0"/>
           </a:p>
         </p:txBody>
       </p:sp>
@@ -4971,7 +5170,7 @@
                 <a:ea typeface="Arial" pitchFamily="34" charset="-122"/>
                 <a:cs typeface="Arial" pitchFamily="34" charset="-120"/>
               </a:rPr>
-              <a:t>QUESTION 6 OF 7</a:t>
+              <a:t>QUESTION 6 OF 8</a:t>
             </a:r>
             <a:endParaRPr lang="en-US" sz="1300" dirty="0"/>
           </a:p>
@@ -5063,17 +5262,17 @@
               <a:buNone/>
             </a:pPr>
             <a:r>
-              <a:rPr lang="en-US" sz="2300" b="1" dirty="0">
-                <a:solidFill>
-                  <a:srgbClr val="FFFFFF"/>
-                </a:solidFill>
-                <a:latin typeface="Arial" pitchFamily="34" charset="0"/>
-                <a:ea typeface="Arial" pitchFamily="34" charset="-122"/>
-                <a:cs typeface="Arial" pitchFamily="34" charset="-120"/>
-              </a:rPr>
-              <a:t>A farmer in Kitale plants hybrid maize seeds in dry soil and they fail to germinate. What is the best advice, and why?</a:t>
-            </a:r>
-            <a:endParaRPr lang="en-US" sz="2300" dirty="0"/>
+              <a:rPr lang="en-US" sz="2000" b="1" dirty="0">
+                <a:solidFill>
+                  <a:srgbClr val="FFFFFF"/>
+                </a:solidFill>
+                <a:latin typeface="Arial" pitchFamily="34" charset="0"/>
+                <a:ea typeface="Arial" pitchFamily="34" charset="-122"/>
+                <a:cs typeface="Arial" pitchFamily="34" charset="-120"/>
+              </a:rPr>
+              <a:t>A bean plant with its shoot tip left on grew 0 branches. After the tip was removed at Day 20, it grew 3 branches. What explains this?</a:t>
+            </a:r>
+            <a:endParaRPr lang="en-US" sz="2000" dirty="0"/>
           </a:p>
         </p:txBody>
       </p:sp>
@@ -5171,7 +5370,7 @@
                 <a:ea typeface="Arial" pitchFamily="34" charset="-122"/>
                 <a:cs typeface="Arial" pitchFamily="34" charset="-120"/>
               </a:rPr>
-              <a:t>Plant the seeds much deeper, because seeds do not need water to germinate</a:t>
+              <a:t>Removing the tip stopped the plant from respiring, so the side buds grew.</a:t>
             </a:r>
             <a:endParaRPr lang="en-US" sz="1300" dirty="0"/>
           </a:p>
@@ -5271,7 +5470,7 @@
                 <a:ea typeface="Arial" pitchFamily="34" charset="-122"/>
                 <a:cs typeface="Arial" pitchFamily="34" charset="-120"/>
               </a:rPr>
-              <a:t>Add hormones to the dry soil, because hormones make seeds grow without water</a:t>
+              <a:t>Auxin made in the shoot tip inhibits the side (lateral) buds, so removing the tip lets them grow into branches.</a:t>
             </a:r>
             <a:endParaRPr lang="en-US" sz="1300" dirty="0"/>
           </a:p>
@@ -5371,7 +5570,7 @@
                 <a:ea typeface="Arial" pitchFamily="34" charset="-122"/>
                 <a:cs typeface="Arial" pitchFamily="34" charset="-120"/>
               </a:rPr>
-              <a:t>Use bigger seeds, because only large seeds need water</a:t>
+              <a:t>Gibberellins from the roots only work after the tip is cut off, so the side buds die.</a:t>
             </a:r>
             <a:endParaRPr lang="en-US" sz="1300" dirty="0"/>
           </a:p>
@@ -5471,7 +5670,7 @@
                 <a:ea typeface="Arial" pitchFamily="34" charset="-122"/>
                 <a:cs typeface="Arial" pitchFamily="34" charset="-120"/>
               </a:rPr>
-              <a:t>Plant when the soil is moist, because water activates enzymes and gibberellins that break down stored food for the embryo</a:t>
+              <a:t>Abscisic acid from the tip makes the plant grow taller, so branches cannot form.</a:t>
             </a:r>
             <a:endParaRPr lang="en-US" sz="1300" dirty="0"/>
           </a:p>
@@ -5581,7 +5780,7 @@
                 <a:ea typeface="Arial" pitchFamily="34" charset="-122"/>
                 <a:cs typeface="Arial" pitchFamily="34" charset="-120"/>
               </a:rPr>
-              <a:t>QUESTION 7 OF 7</a:t>
+              <a:t>QUESTION 7 OF 8</a:t>
             </a:r>
             <a:endParaRPr lang="en-US" sz="1300" dirty="0"/>
           </a:p>
@@ -5673,17 +5872,17 @@
               <a:buNone/>
             </a:pPr>
             <a:r>
-              <a:rPr lang="en-US" sz="2300" b="1" dirty="0">
-                <a:solidFill>
-                  <a:srgbClr val="FFFFFF"/>
-                </a:solidFill>
-                <a:latin typeface="Arial" pitchFamily="34" charset="0"/>
-                <a:ea typeface="Arial" pitchFamily="34" charset="-122"/>
-                <a:cs typeface="Arial" pitchFamily="34" charset="-120"/>
-              </a:rPr>
-              <a:t>A learner writes: 'Then I thought hormones feed a cutting so it can grow. Now I know...' Which ending is correct?</a:t>
-            </a:r>
-            <a:endParaRPr lang="en-US" sz="2300" dirty="0"/>
+              <a:rPr lang="en-US" sz="2000" b="1" dirty="0">
+                <a:solidFill>
+                  <a:srgbClr val="FFFFFF"/>
+                </a:solidFill>
+                <a:latin typeface="Arial" pitchFamily="34" charset="0"/>
+                <a:ea typeface="Arial" pitchFamily="34" charset="-122"/>
+                <a:cs typeface="Arial" pitchFamily="34" charset="-120"/>
+              </a:rPr>
+              <a:t>Maize grew to 125 cm and beans to 44 cm by Day 42. In which part of the plant does the primary growth that lengthens shoots and roots take place?</a:t>
+            </a:r>
+            <a:endParaRPr lang="en-US" sz="2000" dirty="0"/>
           </a:p>
         </p:txBody>
       </p:sp>
@@ -5773,17 +5972,17 @@
               <a:buNone/>
             </a:pPr>
             <a:r>
-              <a:rPr lang="en-US" sz="1300" dirty="0">
-                <a:solidFill>
-                  <a:srgbClr val="FFFFFF"/>
-                </a:solidFill>
-                <a:latin typeface="Arial" pitchFamily="34" charset="0"/>
-                <a:ea typeface="Arial" pitchFamily="34" charset="-122"/>
-                <a:cs typeface="Arial" pitchFamily="34" charset="-120"/>
-              </a:rPr>
-              <a:t>hormones are food stores in the cotyledons that give the plant energy</a:t>
-            </a:r>
-            <a:endParaRPr lang="en-US" sz="1300" dirty="0"/>
+              <a:rPr lang="en-US" sz="1700" dirty="0">
+                <a:solidFill>
+                  <a:srgbClr val="FFFFFF"/>
+                </a:solidFill>
+                <a:latin typeface="Arial" pitchFamily="34" charset="0"/>
+                <a:ea typeface="Arial" pitchFamily="34" charset="-122"/>
+                <a:cs typeface="Arial" pitchFamily="34" charset="-120"/>
+              </a:rPr>
+              <a:t>In the apical meristems at the tips of the shoots and roots</a:t>
+            </a:r>
+            <a:endParaRPr lang="en-US" sz="1700" dirty="0"/>
           </a:p>
         </p:txBody>
       </p:sp>
@@ -5873,17 +6072,17 @@
               <a:buNone/>
             </a:pPr>
             <a:r>
-              <a:rPr lang="en-US" sz="1300" dirty="0">
-                <a:solidFill>
-                  <a:srgbClr val="FFFFFF"/>
-                </a:solidFill>
-                <a:latin typeface="Arial" pitchFamily="34" charset="0"/>
-                <a:ea typeface="Arial" pitchFamily="34" charset="-122"/>
-                <a:cs typeface="Arial" pitchFamily="34" charset="-120"/>
-              </a:rPr>
-              <a:t>hormones are only found in animals, so plants use fertiliser instead</a:t>
-            </a:r>
-            <a:endParaRPr lang="en-US" sz="1300" dirty="0"/>
+              <a:rPr lang="en-US" sz="1700" dirty="0">
+                <a:solidFill>
+                  <a:srgbClr val="FFFFFF"/>
+                </a:solidFill>
+                <a:latin typeface="Arial" pitchFamily="34" charset="0"/>
+                <a:ea typeface="Arial" pitchFamily="34" charset="-122"/>
+                <a:cs typeface="Arial" pitchFamily="34" charset="-120"/>
+              </a:rPr>
+              <a:t>In the testa and micropyle of the seed</a:t>
+            </a:r>
+            <a:endParaRPr lang="en-US" sz="1700" dirty="0"/>
           </a:p>
         </p:txBody>
       </p:sp>
@@ -5973,17 +6172,17 @@
               <a:buNone/>
             </a:pPr>
             <a:r>
-              <a:rPr lang="en-US" sz="1300" dirty="0">
-                <a:solidFill>
-                  <a:srgbClr val="FFFFFF"/>
-                </a:solidFill>
-                <a:latin typeface="Arial" pitchFamily="34" charset="0"/>
-                <a:ea typeface="Arial" pitchFamily="34" charset="-122"/>
-                <a:cs typeface="Arial" pitchFamily="34" charset="-120"/>
-              </a:rPr>
-              <a:t>hormones are needed in large amounts, like water, to make plants grow</a:t>
-            </a:r>
-            <a:endParaRPr lang="en-US" sz="1300" dirty="0"/>
+              <a:rPr lang="en-US" sz="1700" dirty="0">
+                <a:solidFill>
+                  <a:srgbClr val="FFFFFF"/>
+                </a:solidFill>
+                <a:latin typeface="Arial" pitchFamily="34" charset="0"/>
+                <a:ea typeface="Arial" pitchFamily="34" charset="-122"/>
+                <a:cs typeface="Arial" pitchFamily="34" charset="-120"/>
+              </a:rPr>
+              <a:t>In the mature leaf cells that are fully expanded</a:t>
+            </a:r>
+            <a:endParaRPr lang="en-US" sz="1700" dirty="0"/>
           </a:p>
         </p:txBody>
       </p:sp>
@@ -6073,17 +6272,17 @@
               <a:buNone/>
             </a:pPr>
             <a:r>
-              <a:rPr lang="en-US" sz="1300" dirty="0">
-                <a:solidFill>
-                  <a:srgbClr val="FFFFFF"/>
-                </a:solidFill>
-                <a:latin typeface="Arial" pitchFamily="34" charset="0"/>
-                <a:ea typeface="Arial" pitchFamily="34" charset="-122"/>
-                <a:cs typeface="Arial" pitchFamily="34" charset="-120"/>
-              </a:rPr>
-              <a:t>hormones are chemical messengers made in small amounts that control growth, for example auxins stimulate root formation and apical dominance</a:t>
-            </a:r>
-            <a:endParaRPr lang="en-US" sz="1300" dirty="0"/>
+              <a:rPr lang="en-US" sz="1700" dirty="0">
+                <a:solidFill>
+                  <a:srgbClr val="FFFFFF"/>
+                </a:solidFill>
+                <a:latin typeface="Arial" pitchFamily="34" charset="0"/>
+                <a:ea typeface="Arial" pitchFamily="34" charset="-122"/>
+                <a:cs typeface="Arial" pitchFamily="34" charset="-120"/>
+              </a:rPr>
+              <a:t>In the endosperm stored in the seed</a:t>
+            </a:r>
+            <a:endParaRPr lang="en-US" sz="1700" dirty="0"/>
           </a:p>
         </p:txBody>
       </p:sp>
@@ -6140,7 +6339,7 @@
     <p:bg>
       <p:bgPr>
         <a:solidFill>
-          <a:srgbClr val="1F3864"/>
+          <a:srgbClr val="6A4C93"/>
         </a:solidFill>
       </p:bgPr>
     </p:bg>
@@ -6166,73 +6365,573 @@
         </p:nvSpPr>
         <p:spPr>
           <a:xfrm>
-            <a:off x="731520" y="2194560"/>
-            <a:ext cx="10698480" cy="822960"/>
-          </a:xfrm>
-          <a:prstGeom prst="rect">
-            <a:avLst/>
-          </a:prstGeom>
-          <a:noFill/>
-          <a:ln/>
-        </p:spPr>
-        <p:txBody>
-          <a:bodyPr wrap="square" lIns="0" tIns="0" rIns="0" bIns="0" rtlCol="0" anchor="ctr"/>
-          <a:lstStyle/>
-          <a:p>
-            <a:pPr indent="0" marL="0">
-              <a:buNone/>
-            </a:pPr>
-            <a:r>
-              <a:rPr lang="en-US" sz="3400" b="1" dirty="0">
-                <a:solidFill>
-                  <a:srgbClr val="FFFFFF"/>
-                </a:solidFill>
-                <a:latin typeface="Arial" pitchFamily="34" charset="0"/>
-                <a:ea typeface="Arial" pitchFamily="34" charset="-122"/>
-                <a:cs typeface="Arial" pitchFamily="34" charset="-120"/>
-              </a:rPr>
-              <a:t>All done</a:t>
-            </a:r>
-            <a:endParaRPr lang="en-US" sz="3400" dirty="0"/>
-          </a:p>
-        </p:txBody>
-      </p:sp>
-      <p:sp>
-        <p:nvSpPr>
-          <p:cNvPr id="3" name="Text 1"/>
-          <p:cNvSpPr/>
-          <p:nvPr/>
-        </p:nvSpPr>
-        <p:spPr>
-          <a:xfrm>
-            <a:off x="731520" y="3108960"/>
-            <a:ext cx="10698480" cy="731520"/>
-          </a:xfrm>
-          <a:prstGeom prst="rect">
-            <a:avLst/>
-          </a:prstGeom>
-          <a:noFill/>
-          <a:ln/>
-        </p:spPr>
-        <p:txBody>
-          <a:bodyPr wrap="square" lIns="0" tIns="0" rIns="0" bIns="0" rtlCol="0" anchor="ctr"/>
-          <a:lstStyle/>
-          <a:p>
-            <a:pPr indent="0" marL="0">
-              <a:buNone/>
-            </a:pPr>
-            <a:r>
-              <a:rPr lang="en-US" sz="1800" dirty="0">
-                <a:solidFill>
-                  <a:srgbClr val="D9EEF1"/>
-                </a:solidFill>
-                <a:latin typeface="Arial" pitchFamily="34" charset="0"/>
-                <a:ea typeface="Arial" pitchFamily="34" charset="-122"/>
-                <a:cs typeface="Arial" pitchFamily="34" charset="-120"/>
-              </a:rPr>
-              <a:t>Ask your teacher how to submit your answers today (for example, on a paper answer slip).</a:t>
+            <a:off x="548640" y="365760"/>
+            <a:ext cx="6400800" cy="365760"/>
+          </a:xfrm>
+          <a:prstGeom prst="rect">
+            <a:avLst/>
+          </a:prstGeom>
+          <a:noFill/>
+          <a:ln/>
+        </p:spPr>
+        <p:txBody>
+          <a:bodyPr wrap="square" lIns="0" tIns="0" rIns="0" bIns="0" rtlCol="0" anchor="ctr"/>
+          <a:lstStyle/>
+          <a:p>
+            <a:pPr indent="0" marL="0">
+              <a:buNone/>
+            </a:pPr>
+            <a:r>
+              <a:rPr lang="en-US" sz="1300" b="1" spc="200" kern="0" dirty="0">
+                <a:solidFill>
+                  <a:srgbClr val="E0D6F0"/>
+                </a:solidFill>
+                <a:latin typeface="Arial" pitchFamily="34" charset="0"/>
+                <a:ea typeface="Arial" pitchFamily="34" charset="-122"/>
+                <a:cs typeface="Arial" pitchFamily="34" charset="-120"/>
+              </a:rPr>
+              <a:t>QUESTION 8 OF 8</a:t>
+            </a:r>
+            <a:endParaRPr lang="en-US" sz="1300" dirty="0"/>
+          </a:p>
+        </p:txBody>
+      </p:sp>
+      <p:sp>
+        <p:nvSpPr>
+          <p:cNvPr id="3" name="Shape 1"/>
+          <p:cNvSpPr/>
+          <p:nvPr/>
+        </p:nvSpPr>
+        <p:spPr>
+          <a:xfrm>
+            <a:off x="8138160" y="320040"/>
+            <a:ext cx="3474720" cy="365760"/>
+          </a:xfrm>
+          <a:prstGeom prst="roundRect">
+            <a:avLst>
+              <a:gd name="adj" fmla="val 15000"/>
+            </a:avLst>
+          </a:prstGeom>
+          <a:solidFill>
+            <a:srgbClr val="5A3F80"/>
+          </a:solidFill>
+          <a:ln/>
+        </p:spPr>
+      </p:sp>
+      <p:sp>
+        <p:nvSpPr>
+          <p:cNvPr id="4" name="Text 2"/>
+          <p:cNvSpPr/>
+          <p:nvPr/>
+        </p:nvSpPr>
+        <p:spPr>
+          <a:xfrm>
+            <a:off x="8138160" y="320040"/>
+            <a:ext cx="3474720" cy="365760"/>
+          </a:xfrm>
+          <a:prstGeom prst="rect">
+            <a:avLst/>
+          </a:prstGeom>
+          <a:noFill/>
+          <a:ln/>
+        </p:spPr>
+        <p:txBody>
+          <a:bodyPr wrap="square" lIns="0" tIns="0" rIns="0" bIns="0" rtlCol="0" anchor="ctr"/>
+          <a:lstStyle/>
+          <a:p>
+            <a:pPr algn="ctr" indent="0" marL="0">
+              <a:buNone/>
+            </a:pPr>
+            <a:r>
+              <a:rPr lang="en-US" sz="1100" i="1" dirty="0">
+                <a:solidFill>
+                  <a:srgbClr val="E0D6F0"/>
+                </a:solidFill>
+                <a:latin typeface="Arial" pitchFamily="34" charset="0"/>
+                <a:ea typeface="Arial" pitchFamily="34" charset="-122"/>
+                <a:cs typeface="Arial" pitchFamily="34" charset="-120"/>
+              </a:rPr>
+              <a:t>Use after: Model Building phase</a:t>
+            </a:r>
+            <a:endParaRPr lang="en-US" sz="1100" dirty="0"/>
+          </a:p>
+        </p:txBody>
+      </p:sp>
+      <p:sp>
+        <p:nvSpPr>
+          <p:cNvPr id="5" name="Text 3"/>
+          <p:cNvSpPr/>
+          <p:nvPr/>
+        </p:nvSpPr>
+        <p:spPr>
+          <a:xfrm>
+            <a:off x="548640" y="868680"/>
+            <a:ext cx="11064240" cy="1325880"/>
+          </a:xfrm>
+          <a:prstGeom prst="rect">
+            <a:avLst/>
+          </a:prstGeom>
+          <a:noFill/>
+          <a:ln/>
+        </p:spPr>
+        <p:txBody>
+          <a:bodyPr wrap="square" lIns="0" tIns="0" rIns="0" bIns="0" rtlCol="0" anchor="ctr"/>
+          <a:lstStyle/>
+          <a:p>
+            <a:pPr indent="0" marL="0">
+              <a:buNone/>
+            </a:pPr>
+            <a:r>
+              <a:rPr lang="en-US" sz="2000" b="1" dirty="0">
+                <a:solidFill>
+                  <a:srgbClr val="FFFFFF"/>
+                </a:solidFill>
+                <a:latin typeface="Arial" pitchFamily="34" charset="0"/>
+                <a:ea typeface="Arial" pitchFamily="34" charset="-122"/>
+                <a:cs typeface="Arial" pitchFamily="34" charset="-120"/>
+              </a:rPr>
+              <a:t>The school nursery sells 60 aloe vera-treated seedlings at KES 20 each. The polythene tubes and soil cost KES 300. What is the profit?</a:t>
+            </a:r>
+            <a:endParaRPr lang="en-US" sz="2000" dirty="0"/>
+          </a:p>
+        </p:txBody>
+      </p:sp>
+      <p:sp>
+        <p:nvSpPr>
+          <p:cNvPr id="6" name="Shape 4"/>
+          <p:cNvSpPr/>
+          <p:nvPr/>
+        </p:nvSpPr>
+        <p:spPr>
+          <a:xfrm>
+            <a:off x="731520" y="2331720"/>
+            <a:ext cx="10698480" cy="777240"/>
+          </a:xfrm>
+          <a:prstGeom prst="roundRect">
+            <a:avLst>
+              <a:gd name="adj" fmla="val 9412"/>
+            </a:avLst>
+          </a:prstGeom>
+          <a:solidFill>
+            <a:srgbClr val="7C5CAA"/>
+          </a:solidFill>
+          <a:ln/>
+        </p:spPr>
+      </p:sp>
+      <p:sp>
+        <p:nvSpPr>
+          <p:cNvPr id="7" name="Text 5"/>
+          <p:cNvSpPr/>
+          <p:nvPr/>
+        </p:nvSpPr>
+        <p:spPr>
+          <a:xfrm>
+            <a:off x="914400" y="2331720"/>
+            <a:ext cx="548640" cy="777240"/>
+          </a:xfrm>
+          <a:prstGeom prst="rect">
+            <a:avLst/>
+          </a:prstGeom>
+          <a:noFill/>
+          <a:ln/>
+        </p:spPr>
+        <p:txBody>
+          <a:bodyPr wrap="square" lIns="0" tIns="0" rIns="0" bIns="0" rtlCol="0" anchor="ctr"/>
+          <a:lstStyle/>
+          <a:p>
+            <a:pPr indent="0" marL="0">
+              <a:buNone/>
+            </a:pPr>
+            <a:r>
+              <a:rPr lang="en-US" sz="1800" b="1" dirty="0">
+                <a:solidFill>
+                  <a:srgbClr val="FFFFFF"/>
+                </a:solidFill>
+                <a:latin typeface="Arial" pitchFamily="34" charset="0"/>
+                <a:ea typeface="Arial" pitchFamily="34" charset="-122"/>
+                <a:cs typeface="Arial" pitchFamily="34" charset="-120"/>
+              </a:rPr>
+              <a:t>A</a:t>
             </a:r>
             <a:endParaRPr lang="en-US" sz="1800" dirty="0"/>
+          </a:p>
+        </p:txBody>
+      </p:sp>
+      <p:sp>
+        <p:nvSpPr>
+          <p:cNvPr id="8" name="Text 6"/>
+          <p:cNvSpPr/>
+          <p:nvPr/>
+        </p:nvSpPr>
+        <p:spPr>
+          <a:xfrm>
+            <a:off x="1554480" y="2331720"/>
+            <a:ext cx="9692640" cy="777240"/>
+          </a:xfrm>
+          <a:prstGeom prst="rect">
+            <a:avLst/>
+          </a:prstGeom>
+          <a:noFill/>
+          <a:ln/>
+        </p:spPr>
+        <p:txBody>
+          <a:bodyPr wrap="square" lIns="0" tIns="0" rIns="0" bIns="0" rtlCol="0" anchor="ctr"/>
+          <a:lstStyle/>
+          <a:p>
+            <a:pPr indent="0" marL="0">
+              <a:buNone/>
+            </a:pPr>
+            <a:r>
+              <a:rPr lang="en-US" sz="1700" dirty="0">
+                <a:solidFill>
+                  <a:srgbClr val="FFFFFF"/>
+                </a:solidFill>
+                <a:latin typeface="Arial" pitchFamily="34" charset="0"/>
+                <a:ea typeface="Arial" pitchFamily="34" charset="-122"/>
+                <a:cs typeface="Arial" pitchFamily="34" charset="-120"/>
+              </a:rPr>
+              <a:t>KES 900</a:t>
+            </a:r>
+            <a:endParaRPr lang="en-US" sz="1700" dirty="0"/>
+          </a:p>
+        </p:txBody>
+      </p:sp>
+      <p:sp>
+        <p:nvSpPr>
+          <p:cNvPr id="9" name="Shape 7"/>
+          <p:cNvSpPr/>
+          <p:nvPr/>
+        </p:nvSpPr>
+        <p:spPr>
+          <a:xfrm>
+            <a:off x="731520" y="3246120"/>
+            <a:ext cx="10698480" cy="777240"/>
+          </a:xfrm>
+          <a:prstGeom prst="roundRect">
+            <a:avLst>
+              <a:gd name="adj" fmla="val 9412"/>
+            </a:avLst>
+          </a:prstGeom>
+          <a:solidFill>
+            <a:srgbClr val="7C5CAA"/>
+          </a:solidFill>
+          <a:ln/>
+        </p:spPr>
+      </p:sp>
+      <p:sp>
+        <p:nvSpPr>
+          <p:cNvPr id="10" name="Text 8"/>
+          <p:cNvSpPr/>
+          <p:nvPr/>
+        </p:nvSpPr>
+        <p:spPr>
+          <a:xfrm>
+            <a:off x="914400" y="3246120"/>
+            <a:ext cx="548640" cy="777240"/>
+          </a:xfrm>
+          <a:prstGeom prst="rect">
+            <a:avLst/>
+          </a:prstGeom>
+          <a:noFill/>
+          <a:ln/>
+        </p:spPr>
+        <p:txBody>
+          <a:bodyPr wrap="square" lIns="0" tIns="0" rIns="0" bIns="0" rtlCol="0" anchor="ctr"/>
+          <a:lstStyle/>
+          <a:p>
+            <a:pPr indent="0" marL="0">
+              <a:buNone/>
+            </a:pPr>
+            <a:r>
+              <a:rPr lang="en-US" sz="1800" b="1" dirty="0">
+                <a:solidFill>
+                  <a:srgbClr val="FFFFFF"/>
+                </a:solidFill>
+                <a:latin typeface="Arial" pitchFamily="34" charset="0"/>
+                <a:ea typeface="Arial" pitchFamily="34" charset="-122"/>
+                <a:cs typeface="Arial" pitchFamily="34" charset="-120"/>
+              </a:rPr>
+              <a:t>B</a:t>
+            </a:r>
+            <a:endParaRPr lang="en-US" sz="1800" dirty="0"/>
+          </a:p>
+        </p:txBody>
+      </p:sp>
+      <p:sp>
+        <p:nvSpPr>
+          <p:cNvPr id="11" name="Text 9"/>
+          <p:cNvSpPr/>
+          <p:nvPr/>
+        </p:nvSpPr>
+        <p:spPr>
+          <a:xfrm>
+            <a:off x="1554480" y="3246120"/>
+            <a:ext cx="9692640" cy="777240"/>
+          </a:xfrm>
+          <a:prstGeom prst="rect">
+            <a:avLst/>
+          </a:prstGeom>
+          <a:noFill/>
+          <a:ln/>
+        </p:spPr>
+        <p:txBody>
+          <a:bodyPr wrap="square" lIns="0" tIns="0" rIns="0" bIns="0" rtlCol="0" anchor="ctr"/>
+          <a:lstStyle/>
+          <a:p>
+            <a:pPr indent="0" marL="0">
+              <a:buNone/>
+            </a:pPr>
+            <a:r>
+              <a:rPr lang="en-US" sz="1700" dirty="0">
+                <a:solidFill>
+                  <a:srgbClr val="FFFFFF"/>
+                </a:solidFill>
+                <a:latin typeface="Arial" pitchFamily="34" charset="0"/>
+                <a:ea typeface="Arial" pitchFamily="34" charset="-122"/>
+                <a:cs typeface="Arial" pitchFamily="34" charset="-120"/>
+              </a:rPr>
+              <a:t>KES 1,200</a:t>
+            </a:r>
+            <a:endParaRPr lang="en-US" sz="1700" dirty="0"/>
+          </a:p>
+        </p:txBody>
+      </p:sp>
+      <p:sp>
+        <p:nvSpPr>
+          <p:cNvPr id="12" name="Shape 10"/>
+          <p:cNvSpPr/>
+          <p:nvPr/>
+        </p:nvSpPr>
+        <p:spPr>
+          <a:xfrm>
+            <a:off x="731520" y="4160520"/>
+            <a:ext cx="10698480" cy="777240"/>
+          </a:xfrm>
+          <a:prstGeom prst="roundRect">
+            <a:avLst>
+              <a:gd name="adj" fmla="val 9412"/>
+            </a:avLst>
+          </a:prstGeom>
+          <a:solidFill>
+            <a:srgbClr val="7C5CAA"/>
+          </a:solidFill>
+          <a:ln/>
+        </p:spPr>
+      </p:sp>
+      <p:sp>
+        <p:nvSpPr>
+          <p:cNvPr id="13" name="Text 11"/>
+          <p:cNvSpPr/>
+          <p:nvPr/>
+        </p:nvSpPr>
+        <p:spPr>
+          <a:xfrm>
+            <a:off x="914400" y="4160520"/>
+            <a:ext cx="548640" cy="777240"/>
+          </a:xfrm>
+          <a:prstGeom prst="rect">
+            <a:avLst/>
+          </a:prstGeom>
+          <a:noFill/>
+          <a:ln/>
+        </p:spPr>
+        <p:txBody>
+          <a:bodyPr wrap="square" lIns="0" tIns="0" rIns="0" bIns="0" rtlCol="0" anchor="ctr"/>
+          <a:lstStyle/>
+          <a:p>
+            <a:pPr indent="0" marL="0">
+              <a:buNone/>
+            </a:pPr>
+            <a:r>
+              <a:rPr lang="en-US" sz="1800" b="1" dirty="0">
+                <a:solidFill>
+                  <a:srgbClr val="FFFFFF"/>
+                </a:solidFill>
+                <a:latin typeface="Arial" pitchFamily="34" charset="0"/>
+                <a:ea typeface="Arial" pitchFamily="34" charset="-122"/>
+                <a:cs typeface="Arial" pitchFamily="34" charset="-120"/>
+              </a:rPr>
+              <a:t>C</a:t>
+            </a:r>
+            <a:endParaRPr lang="en-US" sz="1800" dirty="0"/>
+          </a:p>
+        </p:txBody>
+      </p:sp>
+      <p:sp>
+        <p:nvSpPr>
+          <p:cNvPr id="14" name="Text 12"/>
+          <p:cNvSpPr/>
+          <p:nvPr/>
+        </p:nvSpPr>
+        <p:spPr>
+          <a:xfrm>
+            <a:off x="1554480" y="4160520"/>
+            <a:ext cx="9692640" cy="777240"/>
+          </a:xfrm>
+          <a:prstGeom prst="rect">
+            <a:avLst/>
+          </a:prstGeom>
+          <a:noFill/>
+          <a:ln/>
+        </p:spPr>
+        <p:txBody>
+          <a:bodyPr wrap="square" lIns="0" tIns="0" rIns="0" bIns="0" rtlCol="0" anchor="ctr"/>
+          <a:lstStyle/>
+          <a:p>
+            <a:pPr indent="0" marL="0">
+              <a:buNone/>
+            </a:pPr>
+            <a:r>
+              <a:rPr lang="en-US" sz="1700" dirty="0">
+                <a:solidFill>
+                  <a:srgbClr val="FFFFFF"/>
+                </a:solidFill>
+                <a:latin typeface="Arial" pitchFamily="34" charset="0"/>
+                <a:ea typeface="Arial" pitchFamily="34" charset="-122"/>
+                <a:cs typeface="Arial" pitchFamily="34" charset="-120"/>
+              </a:rPr>
+              <a:t>KES 300</a:t>
+            </a:r>
+            <a:endParaRPr lang="en-US" sz="1700" dirty="0"/>
+          </a:p>
+        </p:txBody>
+      </p:sp>
+      <p:sp>
+        <p:nvSpPr>
+          <p:cNvPr id="15" name="Shape 13"/>
+          <p:cNvSpPr/>
+          <p:nvPr/>
+        </p:nvSpPr>
+        <p:spPr>
+          <a:xfrm>
+            <a:off x="731520" y="5074920"/>
+            <a:ext cx="10698480" cy="777240"/>
+          </a:xfrm>
+          <a:prstGeom prst="roundRect">
+            <a:avLst>
+              <a:gd name="adj" fmla="val 9412"/>
+            </a:avLst>
+          </a:prstGeom>
+          <a:solidFill>
+            <a:srgbClr val="7C5CAA"/>
+          </a:solidFill>
+          <a:ln/>
+        </p:spPr>
+      </p:sp>
+      <p:sp>
+        <p:nvSpPr>
+          <p:cNvPr id="16" name="Text 14"/>
+          <p:cNvSpPr/>
+          <p:nvPr/>
+        </p:nvSpPr>
+        <p:spPr>
+          <a:xfrm>
+            <a:off x="914400" y="5074920"/>
+            <a:ext cx="548640" cy="777240"/>
+          </a:xfrm>
+          <a:prstGeom prst="rect">
+            <a:avLst/>
+          </a:prstGeom>
+          <a:noFill/>
+          <a:ln/>
+        </p:spPr>
+        <p:txBody>
+          <a:bodyPr wrap="square" lIns="0" tIns="0" rIns="0" bIns="0" rtlCol="0" anchor="ctr"/>
+          <a:lstStyle/>
+          <a:p>
+            <a:pPr indent="0" marL="0">
+              <a:buNone/>
+            </a:pPr>
+            <a:r>
+              <a:rPr lang="en-US" sz="1800" b="1" dirty="0">
+                <a:solidFill>
+                  <a:srgbClr val="FFFFFF"/>
+                </a:solidFill>
+                <a:latin typeface="Arial" pitchFamily="34" charset="0"/>
+                <a:ea typeface="Arial" pitchFamily="34" charset="-122"/>
+                <a:cs typeface="Arial" pitchFamily="34" charset="-120"/>
+              </a:rPr>
+              <a:t>D</a:t>
+            </a:r>
+            <a:endParaRPr lang="en-US" sz="1800" dirty="0"/>
+          </a:p>
+        </p:txBody>
+      </p:sp>
+      <p:sp>
+        <p:nvSpPr>
+          <p:cNvPr id="17" name="Text 15"/>
+          <p:cNvSpPr/>
+          <p:nvPr/>
+        </p:nvSpPr>
+        <p:spPr>
+          <a:xfrm>
+            <a:off x="1554480" y="5074920"/>
+            <a:ext cx="9692640" cy="777240"/>
+          </a:xfrm>
+          <a:prstGeom prst="rect">
+            <a:avLst/>
+          </a:prstGeom>
+          <a:noFill/>
+          <a:ln/>
+        </p:spPr>
+        <p:txBody>
+          <a:bodyPr wrap="square" lIns="0" tIns="0" rIns="0" bIns="0" rtlCol="0" anchor="ctr"/>
+          <a:lstStyle/>
+          <a:p>
+            <a:pPr indent="0" marL="0">
+              <a:buNone/>
+            </a:pPr>
+            <a:r>
+              <a:rPr lang="en-US" sz="1700" dirty="0">
+                <a:solidFill>
+                  <a:srgbClr val="FFFFFF"/>
+                </a:solidFill>
+                <a:latin typeface="Arial" pitchFamily="34" charset="0"/>
+                <a:ea typeface="Arial" pitchFamily="34" charset="-122"/>
+                <a:cs typeface="Arial" pitchFamily="34" charset="-120"/>
+              </a:rPr>
+              <a:t>KES 1,500</a:t>
+            </a:r>
+            <a:endParaRPr lang="en-US" sz="1700" dirty="0"/>
+          </a:p>
+        </p:txBody>
+      </p:sp>
+      <p:sp>
+        <p:nvSpPr>
+          <p:cNvPr id="18" name="Text 16"/>
+          <p:cNvSpPr/>
+          <p:nvPr/>
+        </p:nvSpPr>
+        <p:spPr>
+          <a:xfrm>
+            <a:off x="11521440" y="6446520"/>
+            <a:ext cx="457200" cy="274320"/>
+          </a:xfrm>
+          <a:prstGeom prst="rect">
+            <a:avLst/>
+          </a:prstGeom>
+          <a:noFill/>
+          <a:ln/>
+        </p:spPr>
+        <p:txBody>
+          <a:bodyPr wrap="square" lIns="0" tIns="0" rIns="0" bIns="0" rtlCol="0" anchor="ctr"/>
+          <a:lstStyle/>
+          <a:p>
+            <a:pPr algn="r" indent="0" marL="0">
+              <a:buNone/>
+            </a:pPr>
+            <a:r>
+              <a:rPr lang="en-US" sz="1000" dirty="0">
+                <a:solidFill>
+                  <a:srgbClr val="C9B8E0"/>
+                </a:solidFill>
+                <a:latin typeface="Arial" pitchFamily="34" charset="0"/>
+                <a:ea typeface="Arial" pitchFamily="34" charset="-122"/>
+                <a:cs typeface="Arial" pitchFamily="34" charset="-120"/>
+              </a:rPr>
+              <a:t>9</a:t>
+            </a:r>
+            <a:endParaRPr lang="en-US" sz="1000" dirty="0"/>
           </a:p>
         </p:txBody>
       </p:sp>
